--- a/拉伸模板.pptx
+++ b/拉伸模板.pptx
@@ -5,7 +5,7 @@
     <p:sldMasterId id="2147483648" r:id="rId1"/>
   </p:sldMasterIdLst>
   <p:sldIdLst>
-    <p:sldId id="257" r:id="rId3"/>
+    <p:sldId id="258" r:id="rId3"/>
   </p:sldIdLst>
   <p:sldSz cx="12192000" cy="6858000"/>
   <p:notesSz cx="6858000" cy="9144000"/>
@@ -138,6 +138,7 @@
   <p:cmAuthor id="4" name="zhou_shu" initials="z" lastIdx="1" clrIdx="3"/>
   <p:cmAuthor id="5" name="周澍" initials="周" lastIdx="1" clrIdx="4"/>
   <p:cmAuthor id="75" name="作者" initials="A" lastIdx="0" clrIdx="24"/>
+  <p:cmAuthor id="6" name="W" initials="W" lastIdx="1" clrIdx="5"/>
 </p:cmAuthorLst>
 </file>
 
@@ -273,6 +274,96 @@
 </p:sldLayout>
 </file>
 
+<file path=ppt/slideLayouts/slideLayout2.xml><?xml version="1.0" encoding="utf-8"?>
+<p:sldLayout xmlns:a="http://schemas.openxmlformats.org/drawingml/2006/main" xmlns:r="http://schemas.openxmlformats.org/officeDocument/2006/relationships" xmlns:p="http://schemas.openxmlformats.org/presentationml/2006/main" preserve="1" userDrawn="1">
+  <p:cSld name="内容版面">
+    <p:bg>
+      <p:bgPr>
+        <a:gradFill>
+          <a:gsLst>
+            <a:gs pos="0">
+              <a:schemeClr val="bg1"/>
+            </a:gs>
+            <a:gs pos="100000">
+              <a:schemeClr val="bg1"/>
+            </a:gs>
+            <a:gs pos="68000">
+              <a:srgbClr val="DFF1F2">
+                <a:alpha val="100000"/>
+              </a:srgbClr>
+            </a:gs>
+            <a:gs pos="28000">
+              <a:srgbClr val="E6F4F5"/>
+            </a:gs>
+          </a:gsLst>
+          <a:lin ang="5400000"/>
+        </a:gradFill>
+        <a:effectLst/>
+      </p:bgPr>
+    </p:bg>
+    <p:spTree>
+      <p:nvGrpSpPr>
+        <p:cNvPr id="1" name=""/>
+        <p:cNvGrpSpPr/>
+        <p:nvPr/>
+      </p:nvGrpSpPr>
+      <p:grpSpPr>
+        <a:xfrm>
+          <a:off x="0" y="0"/>
+          <a:ext cx="0" cy="0"/>
+          <a:chOff x="0" y="0"/>
+          <a:chExt cx="0" cy="0"/>
+        </a:xfrm>
+      </p:grpSpPr>
+      <p:sp>
+        <p:nvSpPr>
+          <p:cNvPr id="17" name="标题 16"/>
+          <p:cNvSpPr>
+            <a:spLocks noGrp="1"/>
+          </p:cNvSpPr>
+          <p:nvPr>
+            <p:ph type="title"/>
+          </p:nvPr>
+        </p:nvSpPr>
+        <p:spPr>
+          <a:xfrm>
+            <a:off x="147320" y="0"/>
+            <a:ext cx="9697085" cy="720090"/>
+          </a:xfrm>
+          <a:prstGeom prst="rect">
+            <a:avLst/>
+          </a:prstGeom>
+        </p:spPr>
+        <p:txBody>
+          <a:bodyPr anchor="ctr" anchorCtr="0"/>
+          <a:lstStyle>
+            <a:lvl1pPr>
+              <a:defRPr>
+                <a:solidFill>
+                  <a:srgbClr val="126266"/>
+                </a:solidFill>
+                <a:latin typeface="微软雅黑" panose="020B0503020204020204" charset="-122"/>
+                <a:ea typeface="微软雅黑" panose="020B0503020204020204" charset="-122"/>
+              </a:defRPr>
+            </a:lvl1pPr>
+          </a:lstStyle>
+          <a:p>
+            <a:r>
+              <a:rPr lang="zh-CN" altLang="en-US" dirty="0"/>
+              <a:t>单击此处编辑母版标题样式</a:t>
+            </a:r>
+            <a:endParaRPr lang="zh-CN" altLang="en-US" dirty="0"/>
+          </a:p>
+        </p:txBody>
+      </p:sp>
+    </p:spTree>
+  </p:cSld>
+  <p:clrMapOvr>
+    <a:masterClrMapping/>
+  </p:clrMapOvr>
+</p:sldLayout>
+</file>
+
 <file path=ppt/slideMasters/slideMaster1.xml><?xml version="1.0" encoding="utf-8"?>
 <p:sldMaster xmlns:a="http://schemas.openxmlformats.org/drawingml/2006/main" xmlns:r="http://schemas.openxmlformats.org/officeDocument/2006/relationships" xmlns:p="http://schemas.openxmlformats.org/presentationml/2006/main">
   <p:cSld>
@@ -304,7 +395,7 @@
           <p:nvPr>
             <p:ph type="title"/>
             <p:custDataLst>
-              <p:tags r:id="rId2"/>
+              <p:tags r:id="rId3"/>
             </p:custDataLst>
           </p:nvPr>
         </p:nvSpPr>
@@ -340,7 +431,7 @@
           <p:nvPr>
             <p:ph type="body" idx="1"/>
             <p:custDataLst>
-              <p:tags r:id="rId3"/>
+              <p:tags r:id="rId4"/>
             </p:custDataLst>
           </p:nvPr>
         </p:nvSpPr>
@@ -409,7 +500,7 @@
           <p:nvPr>
             <p:ph type="dt" sz="half" idx="2"/>
             <p:custDataLst>
-              <p:tags r:id="rId4"/>
+              <p:tags r:id="rId5"/>
             </p:custDataLst>
           </p:nvPr>
         </p:nvSpPr>
@@ -454,7 +545,7 @@
           <p:nvPr>
             <p:ph type="ftr" sz="quarter" idx="3"/>
             <p:custDataLst>
-              <p:tags r:id="rId5"/>
+              <p:tags r:id="rId6"/>
             </p:custDataLst>
           </p:nvPr>
         </p:nvSpPr>
@@ -496,7 +587,7 @@
           <p:nvPr>
             <p:ph type="sldNum" sz="quarter" idx="4"/>
             <p:custDataLst>
-              <p:tags r:id="rId6"/>
+              <p:tags r:id="rId7"/>
             </p:custDataLst>
           </p:nvPr>
         </p:nvSpPr>
@@ -534,12 +625,13 @@
       </p:sp>
     </p:spTree>
     <p:custDataLst>
-      <p:tags r:id="rId7"/>
+      <p:tags r:id="rId8"/>
     </p:custDataLst>
   </p:cSld>
   <p:clrMap bg1="lt1" tx1="dk1" bg2="lt2" tx2="dk2" accent1="accent1" accent2="accent2" accent3="accent3" accent4="accent4" accent5="accent5" accent6="accent6" hlink="hlink" folHlink="folHlink"/>
   <p:sldLayoutIdLst>
     <p:sldLayoutId id="2147483649" r:id="rId1"/>
+    <p:sldLayoutId id="2147483650" r:id="rId2"/>
   </p:sldLayoutIdLst>
   <p:txStyles>
     <p:titleStyle>
@@ -925,6 +1017,9 @@
           <a:p>
             <a:r>
               <a:rPr lang="en-US" altLang="zh-CN" b="1" dirty="0">
+                <a:solidFill>
+                  <a:srgbClr val="19898D"/>
+                </a:solidFill>
                 <a:latin typeface="微软雅黑 Light" panose="020B0502040204020203" pitchFamily="34" charset="-122"/>
                 <a:ea typeface="微软雅黑 Light" panose="020B0502040204020203" pitchFamily="34" charset="-122"/>
                 <a:cs typeface="+mn-cs"/>
@@ -933,6 +1028,9 @@
             </a:r>
             <a:r>
               <a:rPr lang="zh-CN" altLang="en-US" b="1" dirty="0">
+                <a:solidFill>
+                  <a:srgbClr val="19898D"/>
+                </a:solidFill>
                 <a:latin typeface="微软雅黑 Light" panose="020B0502040204020203" pitchFamily="34" charset="-122"/>
                 <a:ea typeface="微软雅黑 Light" panose="020B0502040204020203" pitchFamily="34" charset="-122"/>
                 <a:cs typeface="+mn-cs"/>
@@ -941,6 +1039,9 @@
             </a:r>
             <a:r>
               <a:rPr lang="en-US" altLang="zh-CN" b="1" dirty="0">
+                <a:solidFill>
+                  <a:srgbClr val="19898D"/>
+                </a:solidFill>
                 <a:latin typeface="微软雅黑 Light" panose="020B0502040204020203" pitchFamily="34" charset="-122"/>
                 <a:ea typeface="微软雅黑 Light" panose="020B0502040204020203" pitchFamily="34" charset="-122"/>
                 <a:cs typeface="+mn-cs"/>
@@ -949,13 +1050,23 @@
             </a:r>
             <a:r>
               <a:rPr lang="zh-CN" altLang="en-US" b="1" dirty="0">
+                <a:solidFill>
+                  <a:srgbClr val="19898D"/>
+                </a:solidFill>
                 <a:latin typeface="微软雅黑 Light" panose="020B0502040204020203" pitchFamily="34" charset="-122"/>
                 <a:ea typeface="微软雅黑 Light" panose="020B0502040204020203" pitchFamily="34" charset="-122"/>
                 <a:cs typeface="+mn-cs"/>
               </a:rPr>
               <a:t>拉伸性能</a:t>
             </a:r>
-            <a:endParaRPr lang="en-US" altLang="zh-CN" sz="2800" dirty="0"/>
+            <a:endParaRPr lang="zh-CN" altLang="en-US" sz="2800" b="1" dirty="0">
+              <a:solidFill>
+                <a:srgbClr val="19898D"/>
+              </a:solidFill>
+              <a:latin typeface="微软雅黑 Light" panose="020B0502040204020203" pitchFamily="34" charset="-122"/>
+              <a:ea typeface="微软雅黑 Light" panose="020B0502040204020203" pitchFamily="34" charset="-122"/>
+              <a:cs typeface="+mn-cs"/>
+            </a:endParaRPr>
           </a:p>
         </p:txBody>
       </p:sp>
@@ -3892,6 +4003,7 @@
   <p:clrMapOvr>
     <a:masterClrMapping/>
   </p:clrMapOvr>
+  <p:transition/>
 </p:sld>
 </file>
 
